--- a/out/phase5/provisional-green.pptx
+++ b/out/phase5/provisional-green.pptx
@@ -8161,7 +8161,7 @@
         </p:nvSpPr>
         <p:spPr>
           <a:xfrm>
-            <a:off x="6604000" y="889000"/>
+            <a:off x="6604000" y="571500"/>
             <a:ext cx="5080000" cy="1016000"/>
           </a:xfrm>
           <a:prstGeom prst="rect">
@@ -8201,7 +8201,7 @@
         </p:nvSpPr>
         <p:spPr>
           <a:xfrm>
-            <a:off x="6604000" y="2108200"/>
+            <a:off x="6604000" y="1790700"/>
             <a:ext cx="762000" cy="50800"/>
           </a:xfrm>
           <a:custGeom>
@@ -8244,7 +8244,7 @@
         </p:nvSpPr>
         <p:spPr>
           <a:xfrm>
-            <a:off x="6604000" y="2489200"/>
+            <a:off x="6604000" y="2171700"/>
             <a:ext cx="5080000" cy="2311400"/>
           </a:xfrm>
           <a:prstGeom prst="rect">
@@ -8495,7 +8495,7 @@
         </p:nvSpPr>
         <p:spPr>
           <a:xfrm>
-            <a:off x="7061200" y="889000"/>
+            <a:off x="7061200" y="571500"/>
             <a:ext cx="4699000" cy="1016000"/>
           </a:xfrm>
           <a:prstGeom prst="rect">
@@ -8535,7 +8535,7 @@
         </p:nvSpPr>
         <p:spPr>
           <a:xfrm>
-            <a:off x="7061200" y="2603500"/>
+            <a:off x="7061200" y="2286000"/>
             <a:ext cx="152400" cy="152400"/>
           </a:xfrm>
           <a:custGeom>
@@ -8578,7 +8578,7 @@
         </p:nvSpPr>
         <p:spPr>
           <a:xfrm>
-            <a:off x="7366000" y="2540000"/>
+            <a:off x="7366000" y="2222500"/>
             <a:ext cx="4394200" cy="838200"/>
           </a:xfrm>
           <a:prstGeom prst="rect">
@@ -8618,7 +8618,7 @@
         </p:nvSpPr>
         <p:spPr>
           <a:xfrm>
-            <a:off x="7061200" y="3771900"/>
+            <a:off x="7061200" y="3454400"/>
             <a:ext cx="152400" cy="152400"/>
           </a:xfrm>
           <a:custGeom>
@@ -8661,7 +8661,7 @@
         </p:nvSpPr>
         <p:spPr>
           <a:xfrm>
-            <a:off x="7366000" y="3708400"/>
+            <a:off x="7366000" y="3390900"/>
             <a:ext cx="4394200" cy="838200"/>
           </a:xfrm>
           <a:prstGeom prst="rect">
@@ -8701,7 +8701,7 @@
         </p:nvSpPr>
         <p:spPr>
           <a:xfrm>
-            <a:off x="7061200" y="4940300"/>
+            <a:off x="7061200" y="4622800"/>
             <a:ext cx="152400" cy="152400"/>
           </a:xfrm>
           <a:custGeom>
@@ -8744,7 +8744,7 @@
         </p:nvSpPr>
         <p:spPr>
           <a:xfrm>
-            <a:off x="7366000" y="4876800"/>
+            <a:off x="7366000" y="4559300"/>
             <a:ext cx="4394200" cy="838200"/>
           </a:xfrm>
           <a:prstGeom prst="rect">
@@ -11488,7 +11488,7 @@
                   <a:pt x="1854200" y="95250"/>
                 </a:lnTo>
                 <a:lnTo>
-                  <a:pt x="1765300" y="0"/>
+                  <a:pt x="1758950" y="0"/>
                 </a:lnTo>
                 <a:lnTo>
                   <a:pt x="95250" y="0"/>
@@ -11691,7 +11691,7 @@
                   <a:pt x="1854200" y="95250"/>
                 </a:lnTo>
                 <a:lnTo>
-                  <a:pt x="1765300" y="0"/>
+                  <a:pt x="1758950" y="0"/>
                 </a:lnTo>
                 <a:lnTo>
                   <a:pt x="95250" y="0"/>
@@ -11894,7 +11894,7 @@
                   <a:pt x="1854200" y="95250"/>
                 </a:lnTo>
                 <a:lnTo>
-                  <a:pt x="1765300" y="0"/>
+                  <a:pt x="1758950" y="0"/>
                 </a:lnTo>
                 <a:lnTo>
                   <a:pt x="95250" y="0"/>
